--- a/SDC/教学资料/课件/T6-软件设计、重构与系统演化（二）.pptx
+++ b/SDC/教学资料/课件/T6-软件设计、重构与系统演化（二）.pptx
@@ -25,8 +25,8 @@
     <p:sldId id="266" r:id="rId19"/>
     <p:sldId id="267" r:id="rId20"/>
     <p:sldId id="268" r:id="rId21"/>
+    <p:sldId id="270" r:id="rId23"/>
     <p:sldId id="269" r:id="rId22"/>
-    <p:sldId id="270" r:id="rId23"/>
     <p:sldId id="271" r:id="rId24"/>
     <p:sldId id="289" r:id="rId53"/>
     <p:sldId id="272" r:id="rId25"/>
@@ -1630,7 +1630,7 @@
           </a:p>
           <a:p>
             <a:r>
-              <a:t>权衡：外层事务还在，失败仍会一起回滚；不能靠内层注解再规定另一种传播行为。课上用这一页对照下一页的讨论。</a:t>
+              <a:t>权衡：外层事务还在，失败仍会一起回滚；不能靠内层注解再规定另一种传播行为。这一页给出上一页讨论的答案。</a:t>
             </a:r>
           </a:p>
         </p:txBody>
@@ -1725,7 +1725,7 @@
           </a:p>
           <a:p>
             <a:r>
-              <a:t>权衡：课上先听学生怎么拆内外层，再对照上一页。</a:t>
+              <a:t>权衡：课上先听学生怎么拆内外层，再翻下一页对照。</a:t>
             </a:r>
           </a:p>
           <a:p>

--- a/SDC/教学资料/课件/T6-软件设计、重构与系统演化（二）.pptx
+++ b/SDC/教学资料/课件/T6-软件设计、重构与系统演化（二）.pptx
@@ -3775,6 +3775,11 @@
               <a:t>权衡：上一页按层次看，这一页看各部分之间的关系；关系越多，单独替换其中一部分越难。</a:t>
             </a:r>
           </a:p>
+          <a:p>
+            <a:r>
+              <a:t>取舍：可选——时间不足时略去，不影响本课重点、后续理解与作业。</a:t>
+            </a:r>
+          </a:p>
         </p:txBody>
       </p:sp>
       <p:sp>
@@ -3880,6 +3885,11 @@
             <a:r>
               <a:rPr lang="zh-CN" altLang="en-US"/>
               <a:t>权衡：上一页按 Chikofsky 讲四步，看的是抽象层次怎样升降；这个模型按活动列出七步，多出清单分析、文档重构和数据重构。两种划分角度不同，并不矛盾。</a:t>
+            </a:r>
+          </a:p>
+          <a:p>
+            <a:r>
+              <a:t>取舍：可选——时间不足时略去，不影响本课重点、后续理解与作业。</a:t>
             </a:r>
           </a:p>
         </p:txBody>
@@ -8791,7 +8801,7 @@
                 <a:ea typeface="微软雅黑"/>
                 <a:cs typeface="微软雅黑"/>
               </a:rPr>
-              <a:t>内层注解与外层事务</a:t>
+              <a:t>讨论</a:t>
             </a:r>
           </a:p>
         </p:txBody>
@@ -8804,134 +8814,8 @@
         </p:nvSpPr>
         <p:spPr>
           <a:xfrm>
-            <a:off x="411480" y="1645920"/>
-            <a:ext cx="8321040" cy="3977640"/>
-          </a:xfrm>
-          <a:prstGeom prst="rect">
-            <a:avLst/>
-          </a:prstGeom>
-          <a:solidFill>
-            <a:srgbClr val="FBF3F2"/>
-          </a:solidFill>
-          <a:ln w="28575">
-            <a:solidFill>
-              <a:srgbClr val="A33B38"/>
-            </a:solidFill>
-          </a:ln>
-        </p:spPr>
-        <p:txBody>
-          <a:bodyPr wrap="square" lIns="73152" rIns="73152" tIns="36576" bIns="36576" anchor="ctr"/>
-          <a:lstStyle/>
-          <a:p>
-            <a:endParaRPr lang="zh-CN">
-              <a:latin typeface="微软雅黑"/>
-              <a:ea typeface="微软雅黑"/>
-            </a:endParaRPr>
-          </a:p>
-        </p:txBody>
-      </p:sp>
-      <p:sp>
-        <p:nvSpPr>
-          <p:cNvPr id="102" name="fig"/>
-          <p:cNvSpPr/>
-          <p:nvPr/>
-        </p:nvSpPr>
-        <p:spPr>
-          <a:xfrm>
-            <a:off x="594360" y="1755648"/>
-            <a:ext cx="1645920" cy="502920"/>
-          </a:xfrm>
-          <a:prstGeom prst="rect">
-            <a:avLst/>
-          </a:prstGeom>
-          <a:noFill/>
-          <a:ln>
-            <a:noFill/>
-          </a:ln>
-        </p:spPr>
-        <p:txBody>
-          <a:bodyPr wrap="square" lIns="36576" rIns="36576" tIns="18288" bIns="18288" anchor="ctr"/>
-          <a:lstStyle/>
-          <a:p>
-            <a:pPr algn="l">
-              <a:lnSpc>
-                <a:spcPct val="100000"/>
-              </a:lnSpc>
-              <a:buNone/>
-            </a:pPr>
-            <a:r>
-              <a:rPr lang="zh-CN" altLang="en-US" sz="2000" b="1">
-                <a:solidFill>
-                  <a:srgbClr val="A33B38"/>
-                </a:solidFill>
-                <a:latin typeface="微软雅黑"/>
-                <a:ea typeface="微软雅黑"/>
-              </a:rPr>
-              <a:t>外层方法</a:t>
-            </a:r>
-            <a:endParaRPr lang="zh-CN" sz="2000">
-              <a:latin typeface="微软雅黑"/>
-              <a:ea typeface="微软雅黑"/>
-            </a:endParaRPr>
-          </a:p>
-        </p:txBody>
-      </p:sp>
-      <p:sp>
-        <p:nvSpPr>
-          <p:cNvPr id="103" name="fig"/>
-          <p:cNvSpPr/>
-          <p:nvPr/>
-        </p:nvSpPr>
-        <p:spPr>
-          <a:xfrm>
-            <a:off x="2240280" y="1755648"/>
-            <a:ext cx="3291840" cy="502920"/>
-          </a:xfrm>
-          <a:prstGeom prst="rect">
-            <a:avLst/>
-          </a:prstGeom>
-          <a:noFill/>
-          <a:ln>
-            <a:noFill/>
-          </a:ln>
-        </p:spPr>
-        <p:txBody>
-          <a:bodyPr wrap="square" lIns="36576" rIns="36576" tIns="18288" bIns="18288" anchor="ctr"/>
-          <a:lstStyle/>
-          <a:p>
-            <a:pPr algn="l">
-              <a:lnSpc>
-                <a:spcPct val="100000"/>
-              </a:lnSpc>
-              <a:buNone/>
-            </a:pPr>
-            <a:r>
-              <a:rPr lang="zh-CN" altLang="en-US" sz="2000" b="1">
-                <a:solidFill>
-                  <a:srgbClr val="262626"/>
-                </a:solidFill>
-                <a:latin typeface="微软雅黑"/>
-                <a:ea typeface="微软雅黑"/>
-              </a:rPr>
-              <a:t>paySuccessByOrderSn</a:t>
-            </a:r>
-            <a:endParaRPr lang="zh-CN" sz="2000">
-              <a:latin typeface="微软雅黑"/>
-              <a:ea typeface="微软雅黑"/>
-            </a:endParaRPr>
-          </a:p>
-        </p:txBody>
-      </p:sp>
-      <p:sp>
-        <p:nvSpPr>
-          <p:cNvPr id="104" name="fig"/>
-          <p:cNvSpPr/>
-          <p:nvPr/>
-        </p:nvSpPr>
-        <p:spPr>
-          <a:xfrm>
-            <a:off x="5760720" y="1755648"/>
-            <a:ext cx="2743200" cy="502920"/>
+            <a:off x="685800" y="2011680"/>
+            <a:ext cx="109728" cy="2926080"/>
           </a:xfrm>
           <a:prstGeom prst="rect">
             <a:avLst/>
@@ -8949,57 +8833,6 @@
           <a:bodyPr wrap="square" lIns="73152" rIns="73152" tIns="36576" bIns="36576" anchor="ctr"/>
           <a:lstStyle/>
           <a:p>
-            <a:pPr algn="ctr">
-              <a:lnSpc>
-                <a:spcPct val="100000"/>
-              </a:lnSpc>
-              <a:buNone/>
-            </a:pPr>
-            <a:r>
-              <a:rPr lang="zh-CN" altLang="en-US" sz="2000" b="1">
-                <a:solidFill>
-                  <a:srgbClr val="FFFFFF"/>
-                </a:solidFill>
-                <a:latin typeface="微软雅黑"/>
-                <a:ea typeface="微软雅黑"/>
-              </a:rPr>
-              <a:t>由代理进入</a:t>
-            </a:r>
-            <a:endParaRPr lang="zh-CN" sz="2000">
-              <a:latin typeface="微软雅黑"/>
-              <a:ea typeface="微软雅黑"/>
-            </a:endParaRPr>
-          </a:p>
-        </p:txBody>
-      </p:sp>
-      <p:sp>
-        <p:nvSpPr>
-          <p:cNvPr id="105" name="fig-d"/>
-          <p:cNvSpPr/>
-          <p:nvPr/>
-        </p:nvSpPr>
-        <p:spPr>
-          <a:xfrm>
-            <a:off x="685800" y="2423160"/>
-            <a:ext cx="4846320" cy="3017520"/>
-          </a:xfrm>
-          <a:prstGeom prst="rect">
-            <a:avLst/>
-          </a:prstGeom>
-          <a:solidFill>
-            <a:srgbClr val="F5F5F5"/>
-          </a:solidFill>
-          <a:ln w="12700">
-            <a:solidFill>
-              <a:srgbClr val="A6A6A6"/>
-            </a:solidFill>
-            <a:prstDash val="dash"/>
-          </a:ln>
-        </p:spPr>
-        <p:txBody>
-          <a:bodyPr wrap="square" lIns="73152" rIns="73152" tIns="36576" bIns="36576" anchor="ctr"/>
-          <a:lstStyle/>
-          <a:p>
             <a:endParaRPr lang="zh-CN">
               <a:latin typeface="微软雅黑"/>
               <a:ea typeface="微软雅黑"/>
@@ -9009,14 +8842,14 @@
       </p:sp>
       <p:sp>
         <p:nvSpPr>
-          <p:cNvPr id="106" name="fig"/>
+          <p:cNvPr id="102" name="fig-d"/>
           <p:cNvSpPr/>
           <p:nvPr/>
         </p:nvSpPr>
         <p:spPr>
           <a:xfrm>
-            <a:off x="822960" y="2514600"/>
-            <a:ext cx="4572000" cy="502920"/>
+            <a:off x="960120" y="1463040"/>
+            <a:ext cx="1188720" cy="1280160"/>
           </a:xfrm>
           <a:prstGeom prst="rect">
             <a:avLst/>
@@ -9027,7 +8860,7 @@
           </a:ln>
         </p:spPr>
         <p:txBody>
-          <a:bodyPr wrap="square" lIns="36576" rIns="36576" tIns="18288" bIns="18288" anchor="ctr"/>
+          <a:bodyPr wrap="square" lIns="0" rIns="0" tIns="0" bIns="0" anchor="t"/>
           <a:lstStyle/>
           <a:p>
             <a:pPr algn="l">
@@ -9037,16 +8870,16 @@
               <a:buNone/>
             </a:pPr>
             <a:r>
-              <a:rPr lang="zh-CN" altLang="en-US" sz="2000" b="1">
-                <a:solidFill>
-                  <a:srgbClr val="262626"/>
-                </a:solidFill>
-                <a:latin typeface="微软雅黑"/>
-                <a:ea typeface="微软雅黑"/>
-              </a:rPr>
-              <a:t>内层 this.paySuccess</a:t>
-            </a:r>
-            <a:endParaRPr lang="zh-CN" sz="2000">
+              <a:rPr lang="zh-CN" altLang="en-US" sz="7200" b="1">
+                <a:solidFill>
+                  <a:srgbClr val="A33B38"/>
+                </a:solidFill>
+                <a:latin typeface="微软雅黑"/>
+                <a:ea typeface="微软雅黑"/>
+              </a:rPr>
+              <a:t>“</a:t>
+            </a:r>
+            <a:endParaRPr lang="zh-CN" sz="7200">
               <a:latin typeface="微软雅黑"/>
               <a:ea typeface="微软雅黑"/>
             </a:endParaRPr>
@@ -9055,25 +8888,21 @@
       </p:sp>
       <p:sp>
         <p:nvSpPr>
-          <p:cNvPr id="107" name="fig"/>
+          <p:cNvPr id="103" name="fig"/>
           <p:cNvSpPr/>
           <p:nvPr/>
         </p:nvSpPr>
         <p:spPr>
           <a:xfrm>
-            <a:off x="822960" y="3108960"/>
-            <a:ext cx="4572000" cy="594360"/>
+            <a:off x="1097280" y="2377440"/>
+            <a:ext cx="7004304" cy="2377440"/>
           </a:xfrm>
           <a:prstGeom prst="rect">
             <a:avLst/>
           </a:prstGeom>
-          <a:solidFill>
-            <a:srgbClr val="FFFFFF"/>
-          </a:solidFill>
-          <a:ln w="12700">
-            <a:solidFill>
-              <a:srgbClr val="A6A6A6"/>
-            </a:solidFill>
+          <a:noFill/>
+          <a:ln>
+            <a:noFill/>
           </a:ln>
         </p:spPr>
         <p:txBody>
@@ -9087,16 +8916,16 @@
               <a:buNone/>
             </a:pPr>
             <a:r>
-              <a:rPr lang="zh-CN" altLang="en-US" sz="2000" b="0">
+              <a:rPr lang="zh-CN" altLang="en-US" sz="2800" b="1">
                 <a:solidFill>
                   <a:srgbClr val="262626"/>
                 </a:solidFill>
                 <a:latin typeface="微软雅黑"/>
                 <a:ea typeface="微软雅黑"/>
               </a:rPr>
-              <a:t>不经代理</a:t>
-            </a:r>
-            <a:endParaRPr lang="zh-CN" sz="2000">
+              <a:t>this.paySuccess自调用时，内层和外层的事务注解是否生效？</a:t>
+            </a:r>
+            <a:endParaRPr lang="zh-CN" sz="2800">
               <a:latin typeface="微软雅黑"/>
               <a:ea typeface="微软雅黑"/>
             </a:endParaRPr>
@@ -9105,207 +8934,7 @@
       </p:sp>
       <p:sp>
         <p:nvSpPr>
-          <p:cNvPr id="108" name="fig"/>
-          <p:cNvSpPr/>
-          <p:nvPr/>
-        </p:nvSpPr>
-        <p:spPr>
-          <a:xfrm>
-            <a:off x="822960" y="3840480"/>
-            <a:ext cx="4572000" cy="594360"/>
-          </a:xfrm>
-          <a:prstGeom prst="rect">
-            <a:avLst/>
-          </a:prstGeom>
-          <a:solidFill>
-            <a:srgbClr val="FFFFFF"/>
-          </a:solidFill>
-          <a:ln w="12700">
-            <a:solidFill>
-              <a:srgbClr val="A6A6A6"/>
-            </a:solidFill>
-          </a:ln>
-        </p:spPr>
-        <p:txBody>
-          <a:bodyPr wrap="square" lIns="73152" rIns="73152" tIns="36576" bIns="36576" anchor="ctr"/>
-          <a:lstStyle/>
-          <a:p>
-            <a:pPr algn="l">
-              <a:lnSpc>
-                <a:spcPct val="100000"/>
-              </a:lnSpc>
-              <a:buNone/>
-            </a:pPr>
-            <a:r>
-              <a:rPr lang="zh-CN" altLang="en-US" sz="2000" b="0">
-                <a:solidFill>
-                  <a:srgbClr val="262626"/>
-                </a:solidFill>
-                <a:latin typeface="微软雅黑"/>
-                <a:ea typeface="微软雅黑"/>
-              </a:rPr>
-              <a:t>自身注解不单独生效</a:t>
-            </a:r>
-            <a:endParaRPr lang="zh-CN" sz="2000">
-              <a:latin typeface="微软雅黑"/>
-              <a:ea typeface="微软雅黑"/>
-            </a:endParaRPr>
-          </a:p>
-        </p:txBody>
-      </p:sp>
-      <p:sp>
-        <p:nvSpPr>
-          <p:cNvPr id="109" name="fig"/>
-          <p:cNvSpPr/>
-          <p:nvPr/>
-        </p:nvSpPr>
-        <p:spPr>
-          <a:xfrm>
-            <a:off x="822960" y="4572000"/>
-            <a:ext cx="4572000" cy="594360"/>
-          </a:xfrm>
-          <a:prstGeom prst="rect">
-            <a:avLst/>
-          </a:prstGeom>
-          <a:solidFill>
-            <a:srgbClr val="FFFFFF"/>
-          </a:solidFill>
-          <a:ln w="12700">
-            <a:solidFill>
-              <a:srgbClr val="A6A6A6"/>
-            </a:solidFill>
-          </a:ln>
-        </p:spPr>
-        <p:txBody>
-          <a:bodyPr wrap="square" lIns="73152" rIns="73152" tIns="36576" bIns="36576" anchor="ctr"/>
-          <a:lstStyle/>
-          <a:p>
-            <a:pPr algn="l">
-              <a:lnSpc>
-                <a:spcPct val="100000"/>
-              </a:lnSpc>
-              <a:buNone/>
-            </a:pPr>
-            <a:r>
-              <a:rPr lang="zh-CN" altLang="en-US" sz="2000" b="0">
-                <a:solidFill>
-                  <a:srgbClr val="262626"/>
-                </a:solidFill>
-                <a:latin typeface="微软雅黑"/>
-                <a:ea typeface="微软雅黑"/>
-              </a:rPr>
-              <a:t>不会因此再开一层事务</a:t>
-            </a:r>
-            <a:endParaRPr lang="zh-CN" sz="2000">
-              <a:latin typeface="微软雅黑"/>
-              <a:ea typeface="微软雅黑"/>
-            </a:endParaRPr>
-          </a:p>
-        </p:txBody>
-      </p:sp>
-      <p:sp>
-        <p:nvSpPr>
-          <p:cNvPr id="110" name="fig"/>
-          <p:cNvSpPr/>
-          <p:nvPr/>
-        </p:nvSpPr>
-        <p:spPr>
-          <a:xfrm>
-            <a:off x="5760720" y="2423160"/>
-            <a:ext cx="2743200" cy="3017520"/>
-          </a:xfrm>
-          <a:prstGeom prst="rect">
-            <a:avLst/>
-          </a:prstGeom>
-          <a:solidFill>
-            <a:srgbClr val="FFFFFF"/>
-          </a:solidFill>
-          <a:ln w="12700">
-            <a:solidFill>
-              <a:srgbClr val="A33B38"/>
-            </a:solidFill>
-          </a:ln>
-        </p:spPr>
-        <p:txBody>
-          <a:bodyPr wrap="square" lIns="73152" rIns="73152" tIns="36576" bIns="36576" anchor="ctr"/>
-          <a:lstStyle/>
-          <a:p>
-            <a:pPr algn="ctr">
-              <a:lnSpc>
-                <a:spcPct val="100000"/>
-              </a:lnSpc>
-              <a:buNone/>
-            </a:pPr>
-            <a:r>
-              <a:rPr lang="zh-CN" altLang="en-US" sz="2200" b="1">
-                <a:solidFill>
-                  <a:srgbClr val="A33B38"/>
-                </a:solidFill>
-                <a:latin typeface="微软雅黑"/>
-                <a:ea typeface="微软雅黑"/>
-              </a:rPr>
-              <a:t>接口上有事务</a:t>
-            </a:r>
-            <a:endParaRPr lang="zh-CN" sz="2200">
-              <a:latin typeface="微软雅黑"/>
-              <a:ea typeface="微软雅黑"/>
-            </a:endParaRPr>
-          </a:p>
-          <a:p>
-            <a:pPr algn="ctr">
-              <a:lnSpc>
-                <a:spcPct val="100000"/>
-              </a:lnSpc>
-              <a:buNone/>
-            </a:pPr>
-            <a:endParaRPr lang="zh-CN" sz="1000">
-              <a:latin typeface="微软雅黑"/>
-              <a:ea typeface="微软雅黑"/>
-            </a:endParaRPr>
-          </a:p>
-          <a:p>
-            <a:pPr algn="ctr">
-              <a:lnSpc>
-                <a:spcPct val="100000"/>
-              </a:lnSpc>
-              <a:buNone/>
-            </a:pPr>
-            <a:r>
-              <a:rPr lang="zh-CN" altLang="en-US" sz="2200" b="1">
-                <a:solidFill>
-                  <a:srgbClr val="262626"/>
-                </a:solidFill>
-                <a:latin typeface="微软雅黑"/>
-                <a:ea typeface="微软雅黑"/>
-              </a:rPr>
-              <a:t>写库仍在</a:t>
-            </a:r>
-            <a:br>
-              <a:rPr lang="zh-CN" sz="2200">
-                <a:latin typeface="微软雅黑"/>
-                <a:ea typeface="微软雅黑"/>
-              </a:rPr>
-            </a:br>
-            <a:r>
-              <a:rPr lang="zh-CN" altLang="en-US" sz="2200" b="1">
-                <a:solidFill>
-                  <a:srgbClr val="262626"/>
-                </a:solidFill>
-                <a:latin typeface="微软雅黑"/>
-                <a:ea typeface="微软雅黑"/>
-              </a:rPr>
-              <a:t>外层事务中</a:t>
-            </a:r>
-            <a:endParaRPr lang="zh-CN" sz="2200">
-              <a:latin typeface="微软雅黑"/>
-              <a:ea typeface="微软雅黑"/>
-            </a:endParaRPr>
-          </a:p>
-        </p:txBody>
-      </p:sp>
-      <p:sp>
-        <p:nvSpPr>
-          <p:cNvPr id="111" name="sec-label"/>
+          <p:cNvPr id="104" name="sec-label"/>
           <p:cNvSpPr txBox="1"/>
           <p:nvPr/>
         </p:nvSpPr>
@@ -9391,7 +9020,7 @@
                 <a:ea typeface="微软雅黑"/>
                 <a:cs typeface="微软雅黑"/>
               </a:rPr>
-              <a:t>讨论</a:t>
+              <a:t>内层注解与外层事务</a:t>
             </a:r>
           </a:p>
         </p:txBody>
@@ -9404,8 +9033,134 @@
         </p:nvSpPr>
         <p:spPr>
           <a:xfrm>
-            <a:off x="685800" y="2011680"/>
-            <a:ext cx="109728" cy="2926080"/>
+            <a:off x="411480" y="1645920"/>
+            <a:ext cx="8321040" cy="3977640"/>
+          </a:xfrm>
+          <a:prstGeom prst="rect">
+            <a:avLst/>
+          </a:prstGeom>
+          <a:solidFill>
+            <a:srgbClr val="FBF3F2"/>
+          </a:solidFill>
+          <a:ln w="28575">
+            <a:solidFill>
+              <a:srgbClr val="A33B38"/>
+            </a:solidFill>
+          </a:ln>
+        </p:spPr>
+        <p:txBody>
+          <a:bodyPr wrap="square" lIns="73152" rIns="73152" tIns="36576" bIns="36576" anchor="ctr"/>
+          <a:lstStyle/>
+          <a:p>
+            <a:endParaRPr lang="zh-CN">
+              <a:latin typeface="微软雅黑"/>
+              <a:ea typeface="微软雅黑"/>
+            </a:endParaRPr>
+          </a:p>
+        </p:txBody>
+      </p:sp>
+      <p:sp>
+        <p:nvSpPr>
+          <p:cNvPr id="102" name="fig"/>
+          <p:cNvSpPr/>
+          <p:nvPr/>
+        </p:nvSpPr>
+        <p:spPr>
+          <a:xfrm>
+            <a:off x="594360" y="1755648"/>
+            <a:ext cx="1645920" cy="502920"/>
+          </a:xfrm>
+          <a:prstGeom prst="rect">
+            <a:avLst/>
+          </a:prstGeom>
+          <a:noFill/>
+          <a:ln>
+            <a:noFill/>
+          </a:ln>
+        </p:spPr>
+        <p:txBody>
+          <a:bodyPr wrap="square" lIns="36576" rIns="36576" tIns="18288" bIns="18288" anchor="ctr"/>
+          <a:lstStyle/>
+          <a:p>
+            <a:pPr algn="l">
+              <a:lnSpc>
+                <a:spcPct val="100000"/>
+              </a:lnSpc>
+              <a:buNone/>
+            </a:pPr>
+            <a:r>
+              <a:rPr lang="zh-CN" altLang="en-US" sz="2000" b="1">
+                <a:solidFill>
+                  <a:srgbClr val="A33B38"/>
+                </a:solidFill>
+                <a:latin typeface="微软雅黑"/>
+                <a:ea typeface="微软雅黑"/>
+              </a:rPr>
+              <a:t>外层方法</a:t>
+            </a:r>
+            <a:endParaRPr lang="zh-CN" sz="2000">
+              <a:latin typeface="微软雅黑"/>
+              <a:ea typeface="微软雅黑"/>
+            </a:endParaRPr>
+          </a:p>
+        </p:txBody>
+      </p:sp>
+      <p:sp>
+        <p:nvSpPr>
+          <p:cNvPr id="103" name="fig"/>
+          <p:cNvSpPr/>
+          <p:nvPr/>
+        </p:nvSpPr>
+        <p:spPr>
+          <a:xfrm>
+            <a:off x="2240280" y="1755648"/>
+            <a:ext cx="3291840" cy="502920"/>
+          </a:xfrm>
+          <a:prstGeom prst="rect">
+            <a:avLst/>
+          </a:prstGeom>
+          <a:noFill/>
+          <a:ln>
+            <a:noFill/>
+          </a:ln>
+        </p:spPr>
+        <p:txBody>
+          <a:bodyPr wrap="square" lIns="36576" rIns="36576" tIns="18288" bIns="18288" anchor="ctr"/>
+          <a:lstStyle/>
+          <a:p>
+            <a:pPr algn="l">
+              <a:lnSpc>
+                <a:spcPct val="100000"/>
+              </a:lnSpc>
+              <a:buNone/>
+            </a:pPr>
+            <a:r>
+              <a:rPr lang="zh-CN" altLang="en-US" sz="2000" b="1">
+                <a:solidFill>
+                  <a:srgbClr val="262626"/>
+                </a:solidFill>
+                <a:latin typeface="微软雅黑"/>
+                <a:ea typeface="微软雅黑"/>
+              </a:rPr>
+              <a:t>paySuccessByOrderSn</a:t>
+            </a:r>
+            <a:endParaRPr lang="zh-CN" sz="2000">
+              <a:latin typeface="微软雅黑"/>
+              <a:ea typeface="微软雅黑"/>
+            </a:endParaRPr>
+          </a:p>
+        </p:txBody>
+      </p:sp>
+      <p:sp>
+        <p:nvSpPr>
+          <p:cNvPr id="104" name="fig"/>
+          <p:cNvSpPr/>
+          <p:nvPr/>
+        </p:nvSpPr>
+        <p:spPr>
+          <a:xfrm>
+            <a:off x="5760720" y="1755648"/>
+            <a:ext cx="2743200" cy="502920"/>
           </a:xfrm>
           <a:prstGeom prst="rect">
             <a:avLst/>
@@ -9423,6 +9178,57 @@
           <a:bodyPr wrap="square" lIns="73152" rIns="73152" tIns="36576" bIns="36576" anchor="ctr"/>
           <a:lstStyle/>
           <a:p>
+            <a:pPr algn="ctr">
+              <a:lnSpc>
+                <a:spcPct val="100000"/>
+              </a:lnSpc>
+              <a:buNone/>
+            </a:pPr>
+            <a:r>
+              <a:rPr lang="zh-CN" altLang="en-US" sz="2000" b="1">
+                <a:solidFill>
+                  <a:srgbClr val="FFFFFF"/>
+                </a:solidFill>
+                <a:latin typeface="微软雅黑"/>
+                <a:ea typeface="微软雅黑"/>
+              </a:rPr>
+              <a:t>由代理进入</a:t>
+            </a:r>
+            <a:endParaRPr lang="zh-CN" sz="2000">
+              <a:latin typeface="微软雅黑"/>
+              <a:ea typeface="微软雅黑"/>
+            </a:endParaRPr>
+          </a:p>
+        </p:txBody>
+      </p:sp>
+      <p:sp>
+        <p:nvSpPr>
+          <p:cNvPr id="105" name="fig-d"/>
+          <p:cNvSpPr/>
+          <p:nvPr/>
+        </p:nvSpPr>
+        <p:spPr>
+          <a:xfrm>
+            <a:off x="685800" y="2423160"/>
+            <a:ext cx="4846320" cy="3017520"/>
+          </a:xfrm>
+          <a:prstGeom prst="rect">
+            <a:avLst/>
+          </a:prstGeom>
+          <a:solidFill>
+            <a:srgbClr val="F5F5F5"/>
+          </a:solidFill>
+          <a:ln w="12700">
+            <a:solidFill>
+              <a:srgbClr val="A6A6A6"/>
+            </a:solidFill>
+            <a:prstDash val="dash"/>
+          </a:ln>
+        </p:spPr>
+        <p:txBody>
+          <a:bodyPr wrap="square" lIns="73152" rIns="73152" tIns="36576" bIns="36576" anchor="ctr"/>
+          <a:lstStyle/>
+          <a:p>
             <a:endParaRPr lang="zh-CN">
               <a:latin typeface="微软雅黑"/>
               <a:ea typeface="微软雅黑"/>
@@ -9432,14 +9238,14 @@
       </p:sp>
       <p:sp>
         <p:nvSpPr>
-          <p:cNvPr id="102" name="fig-d"/>
+          <p:cNvPr id="106" name="fig"/>
           <p:cNvSpPr/>
           <p:nvPr/>
         </p:nvSpPr>
         <p:spPr>
           <a:xfrm>
-            <a:off x="960120" y="1463040"/>
-            <a:ext cx="1188720" cy="1280160"/>
+            <a:off x="822960" y="2514600"/>
+            <a:ext cx="4572000" cy="502920"/>
           </a:xfrm>
           <a:prstGeom prst="rect">
             <a:avLst/>
@@ -9450,7 +9256,7 @@
           </a:ln>
         </p:spPr>
         <p:txBody>
-          <a:bodyPr wrap="square" lIns="0" rIns="0" tIns="0" bIns="0" anchor="t"/>
+          <a:bodyPr wrap="square" lIns="36576" rIns="36576" tIns="18288" bIns="18288" anchor="ctr"/>
           <a:lstStyle/>
           <a:p>
             <a:pPr algn="l">
@@ -9460,16 +9266,16 @@
               <a:buNone/>
             </a:pPr>
             <a:r>
-              <a:rPr lang="zh-CN" altLang="en-US" sz="7200" b="1">
-                <a:solidFill>
-                  <a:srgbClr val="A33B38"/>
-                </a:solidFill>
-                <a:latin typeface="微软雅黑"/>
-                <a:ea typeface="微软雅黑"/>
-              </a:rPr>
-              <a:t>“</a:t>
-            </a:r>
-            <a:endParaRPr lang="zh-CN" sz="7200">
+              <a:rPr lang="zh-CN" altLang="en-US" sz="2000" b="1">
+                <a:solidFill>
+                  <a:srgbClr val="262626"/>
+                </a:solidFill>
+                <a:latin typeface="微软雅黑"/>
+                <a:ea typeface="微软雅黑"/>
+              </a:rPr>
+              <a:t>内层 this.paySuccess</a:t>
+            </a:r>
+            <a:endParaRPr lang="zh-CN" sz="2000">
               <a:latin typeface="微软雅黑"/>
               <a:ea typeface="微软雅黑"/>
             </a:endParaRPr>
@@ -9478,21 +9284,25 @@
       </p:sp>
       <p:sp>
         <p:nvSpPr>
-          <p:cNvPr id="103" name="fig"/>
+          <p:cNvPr id="107" name="fig"/>
           <p:cNvSpPr/>
           <p:nvPr/>
         </p:nvSpPr>
         <p:spPr>
           <a:xfrm>
-            <a:off x="1097280" y="2377440"/>
-            <a:ext cx="7004304" cy="2377440"/>
+            <a:off x="822960" y="3108960"/>
+            <a:ext cx="4572000" cy="594360"/>
           </a:xfrm>
           <a:prstGeom prst="rect">
             <a:avLst/>
           </a:prstGeom>
-          <a:noFill/>
-          <a:ln>
-            <a:noFill/>
+          <a:solidFill>
+            <a:srgbClr val="FFFFFF"/>
+          </a:solidFill>
+          <a:ln w="12700">
+            <a:solidFill>
+              <a:srgbClr val="A6A6A6"/>
+            </a:solidFill>
           </a:ln>
         </p:spPr>
         <p:txBody>
@@ -9506,16 +9316,16 @@
               <a:buNone/>
             </a:pPr>
             <a:r>
-              <a:rPr lang="zh-CN" altLang="en-US" sz="2800" b="1">
+              <a:rPr lang="zh-CN" altLang="en-US" sz="2000" b="0">
                 <a:solidFill>
                   <a:srgbClr val="262626"/>
                 </a:solidFill>
                 <a:latin typeface="微软雅黑"/>
                 <a:ea typeface="微软雅黑"/>
               </a:rPr>
-              <a:t>this.paySuccess自调用时，内层和外层的事务注解是否生效？</a:t>
-            </a:r>
-            <a:endParaRPr lang="zh-CN" sz="2800">
+              <a:t>不经代理</a:t>
+            </a:r>
+            <a:endParaRPr lang="zh-CN" sz="2000">
               <a:latin typeface="微软雅黑"/>
               <a:ea typeface="微软雅黑"/>
             </a:endParaRPr>
@@ -9524,7 +9334,207 @@
       </p:sp>
       <p:sp>
         <p:nvSpPr>
-          <p:cNvPr id="104" name="sec-label"/>
+          <p:cNvPr id="108" name="fig"/>
+          <p:cNvSpPr/>
+          <p:nvPr/>
+        </p:nvSpPr>
+        <p:spPr>
+          <a:xfrm>
+            <a:off x="822960" y="3840480"/>
+            <a:ext cx="4572000" cy="594360"/>
+          </a:xfrm>
+          <a:prstGeom prst="rect">
+            <a:avLst/>
+          </a:prstGeom>
+          <a:solidFill>
+            <a:srgbClr val="FFFFFF"/>
+          </a:solidFill>
+          <a:ln w="12700">
+            <a:solidFill>
+              <a:srgbClr val="A6A6A6"/>
+            </a:solidFill>
+          </a:ln>
+        </p:spPr>
+        <p:txBody>
+          <a:bodyPr wrap="square" lIns="73152" rIns="73152" tIns="36576" bIns="36576" anchor="ctr"/>
+          <a:lstStyle/>
+          <a:p>
+            <a:pPr algn="l">
+              <a:lnSpc>
+                <a:spcPct val="100000"/>
+              </a:lnSpc>
+              <a:buNone/>
+            </a:pPr>
+            <a:r>
+              <a:rPr lang="zh-CN" altLang="en-US" sz="2000" b="0">
+                <a:solidFill>
+                  <a:srgbClr val="262626"/>
+                </a:solidFill>
+                <a:latin typeface="微软雅黑"/>
+                <a:ea typeface="微软雅黑"/>
+              </a:rPr>
+              <a:t>自身注解不单独生效</a:t>
+            </a:r>
+            <a:endParaRPr lang="zh-CN" sz="2000">
+              <a:latin typeface="微软雅黑"/>
+              <a:ea typeface="微软雅黑"/>
+            </a:endParaRPr>
+          </a:p>
+        </p:txBody>
+      </p:sp>
+      <p:sp>
+        <p:nvSpPr>
+          <p:cNvPr id="109" name="fig"/>
+          <p:cNvSpPr/>
+          <p:nvPr/>
+        </p:nvSpPr>
+        <p:spPr>
+          <a:xfrm>
+            <a:off x="822960" y="4572000"/>
+            <a:ext cx="4572000" cy="594360"/>
+          </a:xfrm>
+          <a:prstGeom prst="rect">
+            <a:avLst/>
+          </a:prstGeom>
+          <a:solidFill>
+            <a:srgbClr val="FFFFFF"/>
+          </a:solidFill>
+          <a:ln w="12700">
+            <a:solidFill>
+              <a:srgbClr val="A6A6A6"/>
+            </a:solidFill>
+          </a:ln>
+        </p:spPr>
+        <p:txBody>
+          <a:bodyPr wrap="square" lIns="73152" rIns="73152" tIns="36576" bIns="36576" anchor="ctr"/>
+          <a:lstStyle/>
+          <a:p>
+            <a:pPr algn="l">
+              <a:lnSpc>
+                <a:spcPct val="100000"/>
+              </a:lnSpc>
+              <a:buNone/>
+            </a:pPr>
+            <a:r>
+              <a:rPr lang="zh-CN" altLang="en-US" sz="2000" b="0">
+                <a:solidFill>
+                  <a:srgbClr val="262626"/>
+                </a:solidFill>
+                <a:latin typeface="微软雅黑"/>
+                <a:ea typeface="微软雅黑"/>
+              </a:rPr>
+              <a:t>不会因此再开一层事务</a:t>
+            </a:r>
+            <a:endParaRPr lang="zh-CN" sz="2000">
+              <a:latin typeface="微软雅黑"/>
+              <a:ea typeface="微软雅黑"/>
+            </a:endParaRPr>
+          </a:p>
+        </p:txBody>
+      </p:sp>
+      <p:sp>
+        <p:nvSpPr>
+          <p:cNvPr id="110" name="fig"/>
+          <p:cNvSpPr/>
+          <p:nvPr/>
+        </p:nvSpPr>
+        <p:spPr>
+          <a:xfrm>
+            <a:off x="5760720" y="2423160"/>
+            <a:ext cx="2743200" cy="3017520"/>
+          </a:xfrm>
+          <a:prstGeom prst="rect">
+            <a:avLst/>
+          </a:prstGeom>
+          <a:solidFill>
+            <a:srgbClr val="FFFFFF"/>
+          </a:solidFill>
+          <a:ln w="12700">
+            <a:solidFill>
+              <a:srgbClr val="A33B38"/>
+            </a:solidFill>
+          </a:ln>
+        </p:spPr>
+        <p:txBody>
+          <a:bodyPr wrap="square" lIns="73152" rIns="73152" tIns="36576" bIns="36576" anchor="ctr"/>
+          <a:lstStyle/>
+          <a:p>
+            <a:pPr algn="ctr">
+              <a:lnSpc>
+                <a:spcPct val="100000"/>
+              </a:lnSpc>
+              <a:buNone/>
+            </a:pPr>
+            <a:r>
+              <a:rPr lang="zh-CN" altLang="en-US" sz="2200" b="1">
+                <a:solidFill>
+                  <a:srgbClr val="A33B38"/>
+                </a:solidFill>
+                <a:latin typeface="微软雅黑"/>
+                <a:ea typeface="微软雅黑"/>
+              </a:rPr>
+              <a:t>接口上有事务</a:t>
+            </a:r>
+            <a:endParaRPr lang="zh-CN" sz="2200">
+              <a:latin typeface="微软雅黑"/>
+              <a:ea typeface="微软雅黑"/>
+            </a:endParaRPr>
+          </a:p>
+          <a:p>
+            <a:pPr algn="ctr">
+              <a:lnSpc>
+                <a:spcPct val="100000"/>
+              </a:lnSpc>
+              <a:buNone/>
+            </a:pPr>
+            <a:endParaRPr lang="zh-CN" sz="1000">
+              <a:latin typeface="微软雅黑"/>
+              <a:ea typeface="微软雅黑"/>
+            </a:endParaRPr>
+          </a:p>
+          <a:p>
+            <a:pPr algn="ctr">
+              <a:lnSpc>
+                <a:spcPct val="100000"/>
+              </a:lnSpc>
+              <a:buNone/>
+            </a:pPr>
+            <a:r>
+              <a:rPr lang="zh-CN" altLang="en-US" sz="2200" b="1">
+                <a:solidFill>
+                  <a:srgbClr val="262626"/>
+                </a:solidFill>
+                <a:latin typeface="微软雅黑"/>
+                <a:ea typeface="微软雅黑"/>
+              </a:rPr>
+              <a:t>写库仍在</a:t>
+            </a:r>
+            <a:br>
+              <a:rPr lang="zh-CN" sz="2200">
+                <a:latin typeface="微软雅黑"/>
+                <a:ea typeface="微软雅黑"/>
+              </a:rPr>
+            </a:br>
+            <a:r>
+              <a:rPr lang="zh-CN" altLang="en-US" sz="2200" b="1">
+                <a:solidFill>
+                  <a:srgbClr val="262626"/>
+                </a:solidFill>
+                <a:latin typeface="微软雅黑"/>
+                <a:ea typeface="微软雅黑"/>
+              </a:rPr>
+              <a:t>外层事务中</a:t>
+            </a:r>
+            <a:endParaRPr lang="zh-CN" sz="2200">
+              <a:latin typeface="微软雅黑"/>
+              <a:ea typeface="微软雅黑"/>
+            </a:endParaRPr>
+          </a:p>
+        </p:txBody>
+      </p:sp>
+      <p:sp>
+        <p:nvSpPr>
+          <p:cNvPr id="111" name="sec-label"/>
           <p:cNvSpPr txBox="1"/>
           <p:nvPr/>
         </p:nvSpPr>
